--- a/templates/commercial-closing.pptx
+++ b/templates/commercial-closing.pptx
@@ -32262,7 +32262,7 @@
 </p:sldMaster>
 </file>
 
-<file path=ppt/slides/slide33.xml><?xml version="1.0" encoding="utf-8"?>
+<file path=ppt/slides/slide1.xml><?xml version="1.0" encoding="utf-8"?>
 <p:sld xmlns:a="http://schemas.openxmlformats.org/drawingml/2006/main" xmlns:r="http://schemas.openxmlformats.org/officeDocument/2006/relationships" xmlns:p="http://schemas.openxmlformats.org/presentationml/2006/main">
   <p:cSld>
     <p:spTree>
@@ -32569,6 +32569,157 @@
           </a:p>
         </p:txBody>
       </p:sp>
+      <p:sp>
+        <p:nvSpPr>
+          <p:cNvPr id="8" name="PIC_Bandeau_Line"/>
+          <p:cNvSpPr>
+            <a:spLocks noChangeShapeType="1"/>
+          </p:cNvSpPr>
+          <p:nvPr/>
+        </p:nvSpPr>
+        <p:spPr bwMode="auto">
+          <a:xfrm>
+            <a:off x="622300" y="687388"/>
+            <a:ext cx="10769600" cy="0"/>
+          </a:xfrm>
+          <a:prstGeom prst="line">
+            <a:avLst/>
+          </a:prstGeom>
+          <a:noFill/>
+          <a:ln w="19050">
+            <a:solidFill>
+              <a:srgbClr val="0070C0"/>
+            </a:solidFill>
+            <a:round/>
+            <a:headEnd/>
+            <a:tailEnd/>
+          </a:ln>
+        </p:spPr>
+        <p:txBody>
+          <a:bodyPr/>
+          <a:lstStyle/>
+          <a:p>
+            <a:endParaRPr lang="fr-FR"/>
+          </a:p>
+        </p:txBody>
+      </p:sp>
+      <p:sp>
+        <p:nvSpPr>
+          <p:cNvPr id="9" name="PIC_Bandeau_Rect_Top"/>
+          <p:cNvSpPr>
+            <a:spLocks noChangeArrowheads="1"/>
+          </p:cNvSpPr>
+          <p:nvPr/>
+        </p:nvSpPr>
+        <p:spPr bwMode="auto">
+          <a:xfrm>
+            <a:off x="0" y="-9128"/>
+            <a:ext cx="152400" cy="2295128"/>
+          </a:xfrm>
+          <a:prstGeom prst="rect">
+            <a:avLst/>
+          </a:prstGeom>
+          <a:solidFill>
+            <a:srgbClr val="99CC00"/>
+          </a:solidFill>
+          <a:ln>
+            <a:noFill/>
+          </a:ln>
+        </p:spPr>
+        <p:txBody>
+          <a:bodyPr wrap="none" anchor="ctr"/>
+          <a:lstStyle/>
+          <a:p>
+            <a:endParaRPr lang="fr-FR"/>
+          </a:p>
+        </p:txBody>
+      </p:sp>
+      <p:sp>
+        <p:nvSpPr>
+          <p:cNvPr id="10" name="PIC_Bandeau_Rect_Mid"/>
+          <p:cNvSpPr>
+            <a:spLocks noChangeArrowheads="1"/>
+          </p:cNvSpPr>
+          <p:nvPr/>
+        </p:nvSpPr>
+        <p:spPr bwMode="auto">
+          <a:xfrm>
+            <a:off x="0" y="2286000"/>
+            <a:ext cx="152400" cy="2286000"/>
+          </a:xfrm>
+          <a:prstGeom prst="rect">
+            <a:avLst/>
+          </a:prstGeom>
+          <a:solidFill>
+            <a:srgbClr val="0070C0"/>
+          </a:solidFill>
+          <a:ln>
+            <a:noFill/>
+          </a:ln>
+        </p:spPr>
+        <p:txBody>
+          <a:bodyPr wrap="none" anchor="ctr"/>
+          <a:lstStyle/>
+          <a:p>
+            <a:endParaRPr lang="fr-FR"/>
+          </a:p>
+        </p:txBody>
+      </p:sp>
+      <p:sp>
+        <p:nvSpPr>
+          <p:cNvPr id="11" name="PIC_Bandeau_Rect_Bot"/>
+          <p:cNvSpPr>
+            <a:spLocks noChangeArrowheads="1"/>
+          </p:cNvSpPr>
+          <p:nvPr/>
+        </p:nvSpPr>
+        <p:spPr bwMode="auto">
+          <a:xfrm>
+            <a:off x="0" y="4560886"/>
+            <a:ext cx="152400" cy="2286000"/>
+          </a:xfrm>
+          <a:prstGeom prst="rect">
+            <a:avLst/>
+          </a:prstGeom>
+          <a:solidFill>
+            <a:srgbClr val="FF6600"/>
+          </a:solidFill>
+          <a:ln>
+            <a:noFill/>
+          </a:ln>
+        </p:spPr>
+        <p:txBody>
+          <a:bodyPr wrap="none" anchor="ctr"/>
+          <a:lstStyle/>
+          <a:p>
+            <a:endParaRPr lang="fr-FR"/>
+          </a:p>
+        </p:txBody>
+      </p:sp>
+      <p:pic>
+        <p:nvPicPr>
+          <p:cNvPr id="12" name="PIC_Bandeau_Logo" descr="image.jpeg"/>
+          <p:cNvPicPr>
+            <a:picLocks noChangeAspect="1"/>
+          </p:cNvPicPr>
+          <p:nvPr/>
+        </p:nvPicPr>
+        <p:blipFill>
+          <a:blip r:embed="rId4"/>
+          <a:stretch>
+            <a:fillRect/>
+          </a:stretch>
+        </p:blipFill>
+        <p:spPr>
+          <a:xfrm>
+            <a:off x="11470314" y="20203"/>
+            <a:ext cx="721686" cy="720000"/>
+          </a:xfrm>
+          <a:prstGeom prst="rect">
+            <a:avLst/>
+          </a:prstGeom>
+        </p:spPr>
+      </p:pic>
     </p:spTree>
     <p:extLst>
       <p:ext uri="{BB962C8B-B14F-4D97-AF65-F5344CB8AC3E}">
@@ -32582,7 +32733,7 @@
 </p:sld>
 </file>
 
-<file path=ppt/slides/slide34.xml><?xml version="1.0" encoding="utf-8"?>
+<file path=ppt/slides/slide2.xml><?xml version="1.0" encoding="utf-8"?>
 <p:sld xmlns:a="http://schemas.openxmlformats.org/drawingml/2006/main" xmlns:r="http://schemas.openxmlformats.org/officeDocument/2006/relationships" xmlns:p="http://schemas.openxmlformats.org/presentationml/2006/main">
   <p:cSld>
     <p:spTree>
@@ -34113,6 +34264,157 @@
           </a:p>
         </p:txBody>
       </p:sp>
+      <p:sp>
+        <p:nvSpPr>
+          <p:cNvPr id="6147" name="PIC_Bandeau_Line"/>
+          <p:cNvSpPr>
+            <a:spLocks noChangeShapeType="1"/>
+          </p:cNvSpPr>
+          <p:nvPr/>
+        </p:nvSpPr>
+        <p:spPr bwMode="auto">
+          <a:xfrm>
+            <a:off x="622300" y="687388"/>
+            <a:ext cx="10769600" cy="0"/>
+          </a:xfrm>
+          <a:prstGeom prst="line">
+            <a:avLst/>
+          </a:prstGeom>
+          <a:noFill/>
+          <a:ln w="19050">
+            <a:solidFill>
+              <a:srgbClr val="0070C0"/>
+            </a:solidFill>
+            <a:round/>
+            <a:headEnd/>
+            <a:tailEnd/>
+          </a:ln>
+        </p:spPr>
+        <p:txBody>
+          <a:bodyPr/>
+          <a:lstStyle/>
+          <a:p>
+            <a:endParaRPr lang="fr-FR"/>
+          </a:p>
+        </p:txBody>
+      </p:sp>
+      <p:sp>
+        <p:nvSpPr>
+          <p:cNvPr id="6148" name="PIC_Bandeau_Rect_Top"/>
+          <p:cNvSpPr>
+            <a:spLocks noChangeArrowheads="1"/>
+          </p:cNvSpPr>
+          <p:nvPr/>
+        </p:nvSpPr>
+        <p:spPr bwMode="auto">
+          <a:xfrm>
+            <a:off x="0" y="-9128"/>
+            <a:ext cx="152400" cy="2295128"/>
+          </a:xfrm>
+          <a:prstGeom prst="rect">
+            <a:avLst/>
+          </a:prstGeom>
+          <a:solidFill>
+            <a:srgbClr val="99CC00"/>
+          </a:solidFill>
+          <a:ln>
+            <a:noFill/>
+          </a:ln>
+        </p:spPr>
+        <p:txBody>
+          <a:bodyPr wrap="none" anchor="ctr"/>
+          <a:lstStyle/>
+          <a:p>
+            <a:endParaRPr lang="fr-FR"/>
+          </a:p>
+        </p:txBody>
+      </p:sp>
+      <p:sp>
+        <p:nvSpPr>
+          <p:cNvPr id="6149" name="PIC_Bandeau_Rect_Mid"/>
+          <p:cNvSpPr>
+            <a:spLocks noChangeArrowheads="1"/>
+          </p:cNvSpPr>
+          <p:nvPr/>
+        </p:nvSpPr>
+        <p:spPr bwMode="auto">
+          <a:xfrm>
+            <a:off x="0" y="2286000"/>
+            <a:ext cx="152400" cy="2286000"/>
+          </a:xfrm>
+          <a:prstGeom prst="rect">
+            <a:avLst/>
+          </a:prstGeom>
+          <a:solidFill>
+            <a:srgbClr val="0070C0"/>
+          </a:solidFill>
+          <a:ln>
+            <a:noFill/>
+          </a:ln>
+        </p:spPr>
+        <p:txBody>
+          <a:bodyPr wrap="none" anchor="ctr"/>
+          <a:lstStyle/>
+          <a:p>
+            <a:endParaRPr lang="fr-FR"/>
+          </a:p>
+        </p:txBody>
+      </p:sp>
+      <p:sp>
+        <p:nvSpPr>
+          <p:cNvPr id="6150" name="PIC_Bandeau_Rect_Bot"/>
+          <p:cNvSpPr>
+            <a:spLocks noChangeArrowheads="1"/>
+          </p:cNvSpPr>
+          <p:nvPr/>
+        </p:nvSpPr>
+        <p:spPr bwMode="auto">
+          <a:xfrm>
+            <a:off x="0" y="4560886"/>
+            <a:ext cx="152400" cy="2286000"/>
+          </a:xfrm>
+          <a:prstGeom prst="rect">
+            <a:avLst/>
+          </a:prstGeom>
+          <a:solidFill>
+            <a:srgbClr val="FF6600"/>
+          </a:solidFill>
+          <a:ln>
+            <a:noFill/>
+          </a:ln>
+        </p:spPr>
+        <p:txBody>
+          <a:bodyPr wrap="none" anchor="ctr"/>
+          <a:lstStyle/>
+          <a:p>
+            <a:endParaRPr lang="fr-FR"/>
+          </a:p>
+        </p:txBody>
+      </p:sp>
+      <p:pic>
+        <p:nvPicPr>
+          <p:cNvPr id="6151" name="PIC_Bandeau_Logo" descr="image.jpeg"/>
+          <p:cNvPicPr>
+            <a:picLocks noChangeAspect="1"/>
+          </p:cNvPicPr>
+          <p:nvPr/>
+        </p:nvPicPr>
+        <p:blipFill>
+          <a:blip r:embed="rId5"/>
+          <a:stretch>
+            <a:fillRect/>
+          </a:stretch>
+        </p:blipFill>
+        <p:spPr>
+          <a:xfrm>
+            <a:off x="11470314" y="20203"/>
+            <a:ext cx="721686" cy="720000"/>
+          </a:xfrm>
+          <a:prstGeom prst="rect">
+            <a:avLst/>
+          </a:prstGeom>
+        </p:spPr>
+      </p:pic>
     </p:spTree>
     <p:custDataLst>
       <p:tags r:id="rId1"/>
@@ -34629,7 +34931,7 @@
 </p:sld>
 </file>
 
-<file path=ppt/slides/slide35.xml><?xml version="1.0" encoding="utf-8"?>
+<file path=ppt/slides/slide3.xml><?xml version="1.0" encoding="utf-8"?>
 <p:sld xmlns:a="http://schemas.openxmlformats.org/drawingml/2006/main" xmlns:r="http://schemas.openxmlformats.org/officeDocument/2006/relationships" xmlns:p="http://schemas.openxmlformats.org/presentationml/2006/main">
   <p:cSld>
     <p:spTree>
@@ -36016,6 +36318,157 @@
           </a:p>
         </p:txBody>
       </p:sp>
+      <p:sp>
+        <p:nvSpPr>
+          <p:cNvPr id="6147" name="PIC_Bandeau_Line"/>
+          <p:cNvSpPr>
+            <a:spLocks noChangeShapeType="1"/>
+          </p:cNvSpPr>
+          <p:nvPr/>
+        </p:nvSpPr>
+        <p:spPr bwMode="auto">
+          <a:xfrm>
+            <a:off x="622300" y="687388"/>
+            <a:ext cx="10769600" cy="0"/>
+          </a:xfrm>
+          <a:prstGeom prst="line">
+            <a:avLst/>
+          </a:prstGeom>
+          <a:noFill/>
+          <a:ln w="19050">
+            <a:solidFill>
+              <a:srgbClr val="0070C0"/>
+            </a:solidFill>
+            <a:round/>
+            <a:headEnd/>
+            <a:tailEnd/>
+          </a:ln>
+        </p:spPr>
+        <p:txBody>
+          <a:bodyPr/>
+          <a:lstStyle/>
+          <a:p>
+            <a:endParaRPr lang="fr-FR"/>
+          </a:p>
+        </p:txBody>
+      </p:sp>
+      <p:sp>
+        <p:nvSpPr>
+          <p:cNvPr id="6148" name="PIC_Bandeau_Rect_Top"/>
+          <p:cNvSpPr>
+            <a:spLocks noChangeArrowheads="1"/>
+          </p:cNvSpPr>
+          <p:nvPr/>
+        </p:nvSpPr>
+        <p:spPr bwMode="auto">
+          <a:xfrm>
+            <a:off x="0" y="-9128"/>
+            <a:ext cx="152400" cy="2295128"/>
+          </a:xfrm>
+          <a:prstGeom prst="rect">
+            <a:avLst/>
+          </a:prstGeom>
+          <a:solidFill>
+            <a:srgbClr val="99CC00"/>
+          </a:solidFill>
+          <a:ln>
+            <a:noFill/>
+          </a:ln>
+        </p:spPr>
+        <p:txBody>
+          <a:bodyPr wrap="none" anchor="ctr"/>
+          <a:lstStyle/>
+          <a:p>
+            <a:endParaRPr lang="fr-FR"/>
+          </a:p>
+        </p:txBody>
+      </p:sp>
+      <p:sp>
+        <p:nvSpPr>
+          <p:cNvPr id="6149" name="PIC_Bandeau_Rect_Mid"/>
+          <p:cNvSpPr>
+            <a:spLocks noChangeArrowheads="1"/>
+          </p:cNvSpPr>
+          <p:nvPr/>
+        </p:nvSpPr>
+        <p:spPr bwMode="auto">
+          <a:xfrm>
+            <a:off x="0" y="2286000"/>
+            <a:ext cx="152400" cy="2286000"/>
+          </a:xfrm>
+          <a:prstGeom prst="rect">
+            <a:avLst/>
+          </a:prstGeom>
+          <a:solidFill>
+            <a:srgbClr val="0070C0"/>
+          </a:solidFill>
+          <a:ln>
+            <a:noFill/>
+          </a:ln>
+        </p:spPr>
+        <p:txBody>
+          <a:bodyPr wrap="none" anchor="ctr"/>
+          <a:lstStyle/>
+          <a:p>
+            <a:endParaRPr lang="fr-FR"/>
+          </a:p>
+        </p:txBody>
+      </p:sp>
+      <p:sp>
+        <p:nvSpPr>
+          <p:cNvPr id="6150" name="PIC_Bandeau_Rect_Bot"/>
+          <p:cNvSpPr>
+            <a:spLocks noChangeArrowheads="1"/>
+          </p:cNvSpPr>
+          <p:nvPr/>
+        </p:nvSpPr>
+        <p:spPr bwMode="auto">
+          <a:xfrm>
+            <a:off x="0" y="4560886"/>
+            <a:ext cx="152400" cy="2286000"/>
+          </a:xfrm>
+          <a:prstGeom prst="rect">
+            <a:avLst/>
+          </a:prstGeom>
+          <a:solidFill>
+            <a:srgbClr val="FF6600"/>
+          </a:solidFill>
+          <a:ln>
+            <a:noFill/>
+          </a:ln>
+        </p:spPr>
+        <p:txBody>
+          <a:bodyPr wrap="none" anchor="ctr"/>
+          <a:lstStyle/>
+          <a:p>
+            <a:endParaRPr lang="fr-FR"/>
+          </a:p>
+        </p:txBody>
+      </p:sp>
+      <p:pic>
+        <p:nvPicPr>
+          <p:cNvPr id="6151" name="PIC_Bandeau_Logo" descr="image.jpeg"/>
+          <p:cNvPicPr>
+            <a:picLocks noChangeAspect="1"/>
+          </p:cNvPicPr>
+          <p:nvPr/>
+        </p:nvPicPr>
+        <p:blipFill>
+          <a:blip r:embed="rId7"/>
+          <a:stretch>
+            <a:fillRect/>
+          </a:stretch>
+        </p:blipFill>
+        <p:spPr>
+          <a:xfrm>
+            <a:off x="11470314" y="20203"/>
+            <a:ext cx="721686" cy="720000"/>
+          </a:xfrm>
+          <a:prstGeom prst="rect">
+            <a:avLst/>
+          </a:prstGeom>
+        </p:spPr>
+      </p:pic>
     </p:spTree>
     <p:custDataLst>
       <p:tags r:id="rId1"/>
@@ -36895,7 +37348,7 @@
 </p:sld>
 </file>
 
-<file path=ppt/slides/slide36.xml><?xml version="1.0" encoding="utf-8"?>
+<file path=ppt/slides/slide4.xml><?xml version="1.0" encoding="utf-8"?>
 <p:sld xmlns:a="http://schemas.openxmlformats.org/drawingml/2006/main" xmlns:r="http://schemas.openxmlformats.org/officeDocument/2006/relationships" xmlns:p="http://schemas.openxmlformats.org/presentationml/2006/main">
   <p:cSld>
     <p:spTree>
@@ -37666,6 +38119,157 @@
           <a:xfrm>
             <a:off x="9751584" y="4735528"/>
             <a:ext cx="2036031" cy="1221619"/>
+          </a:xfrm>
+          <a:prstGeom prst="rect">
+            <a:avLst/>
+          </a:prstGeom>
+        </p:spPr>
+      </p:pic>
+      <p:sp>
+        <p:nvSpPr>
+          <p:cNvPr id="1027" name="PIC_Bandeau_Line"/>
+          <p:cNvSpPr>
+            <a:spLocks noChangeShapeType="1"/>
+          </p:cNvSpPr>
+          <p:nvPr/>
+        </p:nvSpPr>
+        <p:spPr bwMode="auto">
+          <a:xfrm>
+            <a:off x="622300" y="687388"/>
+            <a:ext cx="10769600" cy="0"/>
+          </a:xfrm>
+          <a:prstGeom prst="line">
+            <a:avLst/>
+          </a:prstGeom>
+          <a:noFill/>
+          <a:ln w="19050">
+            <a:solidFill>
+              <a:srgbClr val="0070C0"/>
+            </a:solidFill>
+            <a:round/>
+            <a:headEnd/>
+            <a:tailEnd/>
+          </a:ln>
+        </p:spPr>
+        <p:txBody>
+          <a:bodyPr/>
+          <a:lstStyle/>
+          <a:p>
+            <a:endParaRPr lang="fr-FR"/>
+          </a:p>
+        </p:txBody>
+      </p:sp>
+      <p:sp>
+        <p:nvSpPr>
+          <p:cNvPr id="1028" name="PIC_Bandeau_Rect_Top"/>
+          <p:cNvSpPr>
+            <a:spLocks noChangeArrowheads="1"/>
+          </p:cNvSpPr>
+          <p:nvPr/>
+        </p:nvSpPr>
+        <p:spPr bwMode="auto">
+          <a:xfrm>
+            <a:off x="0" y="-9128"/>
+            <a:ext cx="152400" cy="2295128"/>
+          </a:xfrm>
+          <a:prstGeom prst="rect">
+            <a:avLst/>
+          </a:prstGeom>
+          <a:solidFill>
+            <a:srgbClr val="99CC00"/>
+          </a:solidFill>
+          <a:ln>
+            <a:noFill/>
+          </a:ln>
+        </p:spPr>
+        <p:txBody>
+          <a:bodyPr wrap="none" anchor="ctr"/>
+          <a:lstStyle/>
+          <a:p>
+            <a:endParaRPr lang="fr-FR"/>
+          </a:p>
+        </p:txBody>
+      </p:sp>
+      <p:sp>
+        <p:nvSpPr>
+          <p:cNvPr id="1029" name="PIC_Bandeau_Rect_Mid"/>
+          <p:cNvSpPr>
+            <a:spLocks noChangeArrowheads="1"/>
+          </p:cNvSpPr>
+          <p:nvPr/>
+        </p:nvSpPr>
+        <p:spPr bwMode="auto">
+          <a:xfrm>
+            <a:off x="0" y="2286000"/>
+            <a:ext cx="152400" cy="2286000"/>
+          </a:xfrm>
+          <a:prstGeom prst="rect">
+            <a:avLst/>
+          </a:prstGeom>
+          <a:solidFill>
+            <a:srgbClr val="0070C0"/>
+          </a:solidFill>
+          <a:ln>
+            <a:noFill/>
+          </a:ln>
+        </p:spPr>
+        <p:txBody>
+          <a:bodyPr wrap="none" anchor="ctr"/>
+          <a:lstStyle/>
+          <a:p>
+            <a:endParaRPr lang="fr-FR"/>
+          </a:p>
+        </p:txBody>
+      </p:sp>
+      <p:sp>
+        <p:nvSpPr>
+          <p:cNvPr id="1030" name="PIC_Bandeau_Rect_Bot"/>
+          <p:cNvSpPr>
+            <a:spLocks noChangeArrowheads="1"/>
+          </p:cNvSpPr>
+          <p:nvPr/>
+        </p:nvSpPr>
+        <p:spPr bwMode="auto">
+          <a:xfrm>
+            <a:off x="0" y="4560886"/>
+            <a:ext cx="152400" cy="2286000"/>
+          </a:xfrm>
+          <a:prstGeom prst="rect">
+            <a:avLst/>
+          </a:prstGeom>
+          <a:solidFill>
+            <a:srgbClr val="FF6600"/>
+          </a:solidFill>
+          <a:ln>
+            <a:noFill/>
+          </a:ln>
+        </p:spPr>
+        <p:txBody>
+          <a:bodyPr wrap="none" anchor="ctr"/>
+          <a:lstStyle/>
+          <a:p>
+            <a:endParaRPr lang="fr-FR"/>
+          </a:p>
+        </p:txBody>
+      </p:sp>
+      <p:pic>
+        <p:nvPicPr>
+          <p:cNvPr id="1031" name="PIC_Bandeau_Logo" descr="image.jpeg"/>
+          <p:cNvPicPr>
+            <a:picLocks noChangeAspect="1"/>
+          </p:cNvPicPr>
+          <p:nvPr/>
+        </p:nvPicPr>
+        <p:blipFill>
+          <a:blip r:embed="rId5"/>
+          <a:stretch>
+            <a:fillRect/>
+          </a:stretch>
+        </p:blipFill>
+        <p:spPr>
+          <a:xfrm>
+            <a:off x="11470314" y="20203"/>
+            <a:ext cx="721686" cy="720000"/>
           </a:xfrm>
           <a:prstGeom prst="rect">
             <a:avLst/>
@@ -37809,7 +38413,7 @@
 </p:sld>
 </file>
 
-<file path=ppt/slides/slide37.xml><?xml version="1.0" encoding="utf-8"?>
+<file path=ppt/slides/slide5.xml><?xml version="1.0" encoding="utf-8"?>
 <p:sld xmlns:a="http://schemas.openxmlformats.org/drawingml/2006/main" xmlns:r="http://schemas.openxmlformats.org/officeDocument/2006/relationships" xmlns:p="http://schemas.openxmlformats.org/presentationml/2006/main">
   <p:cSld>
     <p:spTree>
@@ -39955,6 +40559,133 @@
           </a:extLst>
         </p:spPr>
       </p:pic>
+      <p:sp>
+        <p:nvSpPr>
+          <p:cNvPr id="1053" name="PIC_Bandeau_Line"/>
+          <p:cNvSpPr>
+            <a:spLocks noChangeShapeType="1"/>
+          </p:cNvSpPr>
+          <p:nvPr/>
+        </p:nvSpPr>
+        <p:spPr bwMode="auto">
+          <a:xfrm>
+            <a:off x="622300" y="687388"/>
+            <a:ext cx="10769600" cy="0"/>
+          </a:xfrm>
+          <a:prstGeom prst="line">
+            <a:avLst/>
+          </a:prstGeom>
+          <a:noFill/>
+          <a:ln w="19050">
+            <a:solidFill>
+              <a:srgbClr val="0070C0"/>
+            </a:solidFill>
+            <a:round/>
+            <a:headEnd/>
+            <a:tailEnd/>
+          </a:ln>
+        </p:spPr>
+        <p:txBody>
+          <a:bodyPr/>
+          <a:lstStyle/>
+          <a:p>
+            <a:endParaRPr lang="fr-FR"/>
+          </a:p>
+        </p:txBody>
+      </p:sp>
+      <p:sp>
+        <p:nvSpPr>
+          <p:cNvPr id="1054" name="PIC_Bandeau_Rect_Top"/>
+          <p:cNvSpPr>
+            <a:spLocks noChangeArrowheads="1"/>
+          </p:cNvSpPr>
+          <p:nvPr/>
+        </p:nvSpPr>
+        <p:spPr bwMode="auto">
+          <a:xfrm>
+            <a:off x="0" y="-9128"/>
+            <a:ext cx="152400" cy="2295128"/>
+          </a:xfrm>
+          <a:prstGeom prst="rect">
+            <a:avLst/>
+          </a:prstGeom>
+          <a:solidFill>
+            <a:srgbClr val="99CC00"/>
+          </a:solidFill>
+          <a:ln>
+            <a:noFill/>
+          </a:ln>
+        </p:spPr>
+        <p:txBody>
+          <a:bodyPr wrap="none" anchor="ctr"/>
+          <a:lstStyle/>
+          <a:p>
+            <a:endParaRPr lang="fr-FR"/>
+          </a:p>
+        </p:txBody>
+      </p:sp>
+      <p:sp>
+        <p:nvSpPr>
+          <p:cNvPr id="1055" name="PIC_Bandeau_Rect_Mid"/>
+          <p:cNvSpPr>
+            <a:spLocks noChangeArrowheads="1"/>
+          </p:cNvSpPr>
+          <p:nvPr/>
+        </p:nvSpPr>
+        <p:spPr bwMode="auto">
+          <a:xfrm>
+            <a:off x="0" y="2286000"/>
+            <a:ext cx="152400" cy="2286000"/>
+          </a:xfrm>
+          <a:prstGeom prst="rect">
+            <a:avLst/>
+          </a:prstGeom>
+          <a:solidFill>
+            <a:srgbClr val="0070C0"/>
+          </a:solidFill>
+          <a:ln>
+            <a:noFill/>
+          </a:ln>
+        </p:spPr>
+        <p:txBody>
+          <a:bodyPr wrap="none" anchor="ctr"/>
+          <a:lstStyle/>
+          <a:p>
+            <a:endParaRPr lang="fr-FR"/>
+          </a:p>
+        </p:txBody>
+      </p:sp>
+      <p:sp>
+        <p:nvSpPr>
+          <p:cNvPr id="1056" name="PIC_Bandeau_Rect_Bot"/>
+          <p:cNvSpPr>
+            <a:spLocks noChangeArrowheads="1"/>
+          </p:cNvSpPr>
+          <p:nvPr/>
+        </p:nvSpPr>
+        <p:spPr bwMode="auto">
+          <a:xfrm>
+            <a:off x="0" y="4560886"/>
+            <a:ext cx="152400" cy="2286000"/>
+          </a:xfrm>
+          <a:prstGeom prst="rect">
+            <a:avLst/>
+          </a:prstGeom>
+          <a:solidFill>
+            <a:srgbClr val="FF6600"/>
+          </a:solidFill>
+          <a:ln>
+            <a:noFill/>
+          </a:ln>
+        </p:spPr>
+        <p:txBody>
+          <a:bodyPr wrap="none" anchor="ctr"/>
+          <a:lstStyle/>
+          <a:p>
+            <a:endParaRPr lang="fr-FR"/>
+          </a:p>
+        </p:txBody>
+      </p:sp>
     </p:spTree>
     <p:extLst>
       <p:ext uri="{BB962C8B-B14F-4D97-AF65-F5344CB8AC3E}">
@@ -39968,7 +40699,7 @@
 </p:sld>
 </file>
 
-<file path=ppt/slides/slide38.xml><?xml version="1.0" encoding="utf-8"?>
+<file path=ppt/slides/slide6.xml><?xml version="1.0" encoding="utf-8"?>
 <p:sld xmlns:a="http://schemas.openxmlformats.org/drawingml/2006/main" xmlns:r="http://schemas.openxmlformats.org/officeDocument/2006/relationships" xmlns:p="http://schemas.openxmlformats.org/presentationml/2006/main">
   <p:cSld>
     <p:spTree>
@@ -42665,6 +43396,133 @@
           </a:prstGeom>
         </p:spPr>
       </p:pic>
+      <p:sp>
+        <p:nvSpPr>
+          <p:cNvPr id="20523" name="PIC_Bandeau_Line"/>
+          <p:cNvSpPr>
+            <a:spLocks noChangeShapeType="1"/>
+          </p:cNvSpPr>
+          <p:nvPr/>
+        </p:nvSpPr>
+        <p:spPr bwMode="auto">
+          <a:xfrm>
+            <a:off x="622300" y="687388"/>
+            <a:ext cx="10769600" cy="0"/>
+          </a:xfrm>
+          <a:prstGeom prst="line">
+            <a:avLst/>
+          </a:prstGeom>
+          <a:noFill/>
+          <a:ln w="19050">
+            <a:solidFill>
+              <a:srgbClr val="0070C0"/>
+            </a:solidFill>
+            <a:round/>
+            <a:headEnd/>
+            <a:tailEnd/>
+          </a:ln>
+        </p:spPr>
+        <p:txBody>
+          <a:bodyPr/>
+          <a:lstStyle/>
+          <a:p>
+            <a:endParaRPr lang="fr-FR"/>
+          </a:p>
+        </p:txBody>
+      </p:sp>
+      <p:sp>
+        <p:nvSpPr>
+          <p:cNvPr id="20524" name="PIC_Bandeau_Rect_Top"/>
+          <p:cNvSpPr>
+            <a:spLocks noChangeArrowheads="1"/>
+          </p:cNvSpPr>
+          <p:nvPr/>
+        </p:nvSpPr>
+        <p:spPr bwMode="auto">
+          <a:xfrm>
+            <a:off x="0" y="-9128"/>
+            <a:ext cx="152400" cy="2295128"/>
+          </a:xfrm>
+          <a:prstGeom prst="rect">
+            <a:avLst/>
+          </a:prstGeom>
+          <a:solidFill>
+            <a:srgbClr val="99CC00"/>
+          </a:solidFill>
+          <a:ln>
+            <a:noFill/>
+          </a:ln>
+        </p:spPr>
+        <p:txBody>
+          <a:bodyPr wrap="none" anchor="ctr"/>
+          <a:lstStyle/>
+          <a:p>
+            <a:endParaRPr lang="fr-FR"/>
+          </a:p>
+        </p:txBody>
+      </p:sp>
+      <p:sp>
+        <p:nvSpPr>
+          <p:cNvPr id="20525" name="PIC_Bandeau_Rect_Mid"/>
+          <p:cNvSpPr>
+            <a:spLocks noChangeArrowheads="1"/>
+          </p:cNvSpPr>
+          <p:nvPr/>
+        </p:nvSpPr>
+        <p:spPr bwMode="auto">
+          <a:xfrm>
+            <a:off x="0" y="2286000"/>
+            <a:ext cx="152400" cy="2286000"/>
+          </a:xfrm>
+          <a:prstGeom prst="rect">
+            <a:avLst/>
+          </a:prstGeom>
+          <a:solidFill>
+            <a:srgbClr val="0070C0"/>
+          </a:solidFill>
+          <a:ln>
+            <a:noFill/>
+          </a:ln>
+        </p:spPr>
+        <p:txBody>
+          <a:bodyPr wrap="none" anchor="ctr"/>
+          <a:lstStyle/>
+          <a:p>
+            <a:endParaRPr lang="fr-FR"/>
+          </a:p>
+        </p:txBody>
+      </p:sp>
+      <p:sp>
+        <p:nvSpPr>
+          <p:cNvPr id="20526" name="PIC_Bandeau_Rect_Bot"/>
+          <p:cNvSpPr>
+            <a:spLocks noChangeArrowheads="1"/>
+          </p:cNvSpPr>
+          <p:nvPr/>
+        </p:nvSpPr>
+        <p:spPr bwMode="auto">
+          <a:xfrm>
+            <a:off x="0" y="4560886"/>
+            <a:ext cx="152400" cy="2286000"/>
+          </a:xfrm>
+          <a:prstGeom prst="rect">
+            <a:avLst/>
+          </a:prstGeom>
+          <a:solidFill>
+            <a:srgbClr val="FF6600"/>
+          </a:solidFill>
+          <a:ln>
+            <a:noFill/>
+          </a:ln>
+        </p:spPr>
+        <p:txBody>
+          <a:bodyPr wrap="none" anchor="ctr"/>
+          <a:lstStyle/>
+          <a:p>
+            <a:endParaRPr lang="fr-FR"/>
+          </a:p>
+        </p:txBody>
+      </p:sp>
     </p:spTree>
     <p:custDataLst>
       <p:tags r:id="rId1"/>

--- a/templates/commercial-closing.pptx
+++ b/templates/commercial-closing.pptx
@@ -32569,157 +32569,6 @@
           </a:p>
         </p:txBody>
       </p:sp>
-      <p:sp>
-        <p:nvSpPr>
-          <p:cNvPr id="8" name="PIC_Bandeau_Line"/>
-          <p:cNvSpPr>
-            <a:spLocks noChangeShapeType="1"/>
-          </p:cNvSpPr>
-          <p:nvPr/>
-        </p:nvSpPr>
-        <p:spPr bwMode="auto">
-          <a:xfrm>
-            <a:off x="622300" y="687388"/>
-            <a:ext cx="10769600" cy="0"/>
-          </a:xfrm>
-          <a:prstGeom prst="line">
-            <a:avLst/>
-          </a:prstGeom>
-          <a:noFill/>
-          <a:ln w="19050">
-            <a:solidFill>
-              <a:srgbClr val="0070C0"/>
-            </a:solidFill>
-            <a:round/>
-            <a:headEnd/>
-            <a:tailEnd/>
-          </a:ln>
-        </p:spPr>
-        <p:txBody>
-          <a:bodyPr/>
-          <a:lstStyle/>
-          <a:p>
-            <a:endParaRPr lang="fr-FR"/>
-          </a:p>
-        </p:txBody>
-      </p:sp>
-      <p:sp>
-        <p:nvSpPr>
-          <p:cNvPr id="9" name="PIC_Bandeau_Rect_Top"/>
-          <p:cNvSpPr>
-            <a:spLocks noChangeArrowheads="1"/>
-          </p:cNvSpPr>
-          <p:nvPr/>
-        </p:nvSpPr>
-        <p:spPr bwMode="auto">
-          <a:xfrm>
-            <a:off x="0" y="-9128"/>
-            <a:ext cx="152400" cy="2295128"/>
-          </a:xfrm>
-          <a:prstGeom prst="rect">
-            <a:avLst/>
-          </a:prstGeom>
-          <a:solidFill>
-            <a:srgbClr val="99CC00"/>
-          </a:solidFill>
-          <a:ln>
-            <a:noFill/>
-          </a:ln>
-        </p:spPr>
-        <p:txBody>
-          <a:bodyPr wrap="none" anchor="ctr"/>
-          <a:lstStyle/>
-          <a:p>
-            <a:endParaRPr lang="fr-FR"/>
-          </a:p>
-        </p:txBody>
-      </p:sp>
-      <p:sp>
-        <p:nvSpPr>
-          <p:cNvPr id="10" name="PIC_Bandeau_Rect_Mid"/>
-          <p:cNvSpPr>
-            <a:spLocks noChangeArrowheads="1"/>
-          </p:cNvSpPr>
-          <p:nvPr/>
-        </p:nvSpPr>
-        <p:spPr bwMode="auto">
-          <a:xfrm>
-            <a:off x="0" y="2286000"/>
-            <a:ext cx="152400" cy="2286000"/>
-          </a:xfrm>
-          <a:prstGeom prst="rect">
-            <a:avLst/>
-          </a:prstGeom>
-          <a:solidFill>
-            <a:srgbClr val="0070C0"/>
-          </a:solidFill>
-          <a:ln>
-            <a:noFill/>
-          </a:ln>
-        </p:spPr>
-        <p:txBody>
-          <a:bodyPr wrap="none" anchor="ctr"/>
-          <a:lstStyle/>
-          <a:p>
-            <a:endParaRPr lang="fr-FR"/>
-          </a:p>
-        </p:txBody>
-      </p:sp>
-      <p:sp>
-        <p:nvSpPr>
-          <p:cNvPr id="11" name="PIC_Bandeau_Rect_Bot"/>
-          <p:cNvSpPr>
-            <a:spLocks noChangeArrowheads="1"/>
-          </p:cNvSpPr>
-          <p:nvPr/>
-        </p:nvSpPr>
-        <p:spPr bwMode="auto">
-          <a:xfrm>
-            <a:off x="0" y="4560886"/>
-            <a:ext cx="152400" cy="2286000"/>
-          </a:xfrm>
-          <a:prstGeom prst="rect">
-            <a:avLst/>
-          </a:prstGeom>
-          <a:solidFill>
-            <a:srgbClr val="FF6600"/>
-          </a:solidFill>
-          <a:ln>
-            <a:noFill/>
-          </a:ln>
-        </p:spPr>
-        <p:txBody>
-          <a:bodyPr wrap="none" anchor="ctr"/>
-          <a:lstStyle/>
-          <a:p>
-            <a:endParaRPr lang="fr-FR"/>
-          </a:p>
-        </p:txBody>
-      </p:sp>
-      <p:pic>
-        <p:nvPicPr>
-          <p:cNvPr id="12" name="PIC_Bandeau_Logo" descr="image.jpeg"/>
-          <p:cNvPicPr>
-            <a:picLocks noChangeAspect="1"/>
-          </p:cNvPicPr>
-          <p:nvPr/>
-        </p:nvPicPr>
-        <p:blipFill>
-          <a:blip r:embed="rId4"/>
-          <a:stretch>
-            <a:fillRect/>
-          </a:stretch>
-        </p:blipFill>
-        <p:spPr>
-          <a:xfrm>
-            <a:off x="11470314" y="20203"/>
-            <a:ext cx="721686" cy="720000"/>
-          </a:xfrm>
-          <a:prstGeom prst="rect">
-            <a:avLst/>
-          </a:prstGeom>
-        </p:spPr>
-      </p:pic>
     </p:spTree>
     <p:extLst>
       <p:ext uri="{BB962C8B-B14F-4D97-AF65-F5344CB8AC3E}">
@@ -34264,157 +34113,6 @@
           </a:p>
         </p:txBody>
       </p:sp>
-      <p:sp>
-        <p:nvSpPr>
-          <p:cNvPr id="6147" name="PIC_Bandeau_Line"/>
-          <p:cNvSpPr>
-            <a:spLocks noChangeShapeType="1"/>
-          </p:cNvSpPr>
-          <p:nvPr/>
-        </p:nvSpPr>
-        <p:spPr bwMode="auto">
-          <a:xfrm>
-            <a:off x="622300" y="687388"/>
-            <a:ext cx="10769600" cy="0"/>
-          </a:xfrm>
-          <a:prstGeom prst="line">
-            <a:avLst/>
-          </a:prstGeom>
-          <a:noFill/>
-          <a:ln w="19050">
-            <a:solidFill>
-              <a:srgbClr val="0070C0"/>
-            </a:solidFill>
-            <a:round/>
-            <a:headEnd/>
-            <a:tailEnd/>
-          </a:ln>
-        </p:spPr>
-        <p:txBody>
-          <a:bodyPr/>
-          <a:lstStyle/>
-          <a:p>
-            <a:endParaRPr lang="fr-FR"/>
-          </a:p>
-        </p:txBody>
-      </p:sp>
-      <p:sp>
-        <p:nvSpPr>
-          <p:cNvPr id="6148" name="PIC_Bandeau_Rect_Top"/>
-          <p:cNvSpPr>
-            <a:spLocks noChangeArrowheads="1"/>
-          </p:cNvSpPr>
-          <p:nvPr/>
-        </p:nvSpPr>
-        <p:spPr bwMode="auto">
-          <a:xfrm>
-            <a:off x="0" y="-9128"/>
-            <a:ext cx="152400" cy="2295128"/>
-          </a:xfrm>
-          <a:prstGeom prst="rect">
-            <a:avLst/>
-          </a:prstGeom>
-          <a:solidFill>
-            <a:srgbClr val="99CC00"/>
-          </a:solidFill>
-          <a:ln>
-            <a:noFill/>
-          </a:ln>
-        </p:spPr>
-        <p:txBody>
-          <a:bodyPr wrap="none" anchor="ctr"/>
-          <a:lstStyle/>
-          <a:p>
-            <a:endParaRPr lang="fr-FR"/>
-          </a:p>
-        </p:txBody>
-      </p:sp>
-      <p:sp>
-        <p:nvSpPr>
-          <p:cNvPr id="6149" name="PIC_Bandeau_Rect_Mid"/>
-          <p:cNvSpPr>
-            <a:spLocks noChangeArrowheads="1"/>
-          </p:cNvSpPr>
-          <p:nvPr/>
-        </p:nvSpPr>
-        <p:spPr bwMode="auto">
-          <a:xfrm>
-            <a:off x="0" y="2286000"/>
-            <a:ext cx="152400" cy="2286000"/>
-          </a:xfrm>
-          <a:prstGeom prst="rect">
-            <a:avLst/>
-          </a:prstGeom>
-          <a:solidFill>
-            <a:srgbClr val="0070C0"/>
-          </a:solidFill>
-          <a:ln>
-            <a:noFill/>
-          </a:ln>
-        </p:spPr>
-        <p:txBody>
-          <a:bodyPr wrap="none" anchor="ctr"/>
-          <a:lstStyle/>
-          <a:p>
-            <a:endParaRPr lang="fr-FR"/>
-          </a:p>
-        </p:txBody>
-      </p:sp>
-      <p:sp>
-        <p:nvSpPr>
-          <p:cNvPr id="6150" name="PIC_Bandeau_Rect_Bot"/>
-          <p:cNvSpPr>
-            <a:spLocks noChangeArrowheads="1"/>
-          </p:cNvSpPr>
-          <p:nvPr/>
-        </p:nvSpPr>
-        <p:spPr bwMode="auto">
-          <a:xfrm>
-            <a:off x="0" y="4560886"/>
-            <a:ext cx="152400" cy="2286000"/>
-          </a:xfrm>
-          <a:prstGeom prst="rect">
-            <a:avLst/>
-          </a:prstGeom>
-          <a:solidFill>
-            <a:srgbClr val="FF6600"/>
-          </a:solidFill>
-          <a:ln>
-            <a:noFill/>
-          </a:ln>
-        </p:spPr>
-        <p:txBody>
-          <a:bodyPr wrap="none" anchor="ctr"/>
-          <a:lstStyle/>
-          <a:p>
-            <a:endParaRPr lang="fr-FR"/>
-          </a:p>
-        </p:txBody>
-      </p:sp>
-      <p:pic>
-        <p:nvPicPr>
-          <p:cNvPr id="6151" name="PIC_Bandeau_Logo" descr="image.jpeg"/>
-          <p:cNvPicPr>
-            <a:picLocks noChangeAspect="1"/>
-          </p:cNvPicPr>
-          <p:nvPr/>
-        </p:nvPicPr>
-        <p:blipFill>
-          <a:blip r:embed="rId5"/>
-          <a:stretch>
-            <a:fillRect/>
-          </a:stretch>
-        </p:blipFill>
-        <p:spPr>
-          <a:xfrm>
-            <a:off x="11470314" y="20203"/>
-            <a:ext cx="721686" cy="720000"/>
-          </a:xfrm>
-          <a:prstGeom prst="rect">
-            <a:avLst/>
-          </a:prstGeom>
-        </p:spPr>
-      </p:pic>
     </p:spTree>
     <p:custDataLst>
       <p:tags r:id="rId1"/>
@@ -36318,157 +36016,6 @@
           </a:p>
         </p:txBody>
       </p:sp>
-      <p:sp>
-        <p:nvSpPr>
-          <p:cNvPr id="6147" name="PIC_Bandeau_Line"/>
-          <p:cNvSpPr>
-            <a:spLocks noChangeShapeType="1"/>
-          </p:cNvSpPr>
-          <p:nvPr/>
-        </p:nvSpPr>
-        <p:spPr bwMode="auto">
-          <a:xfrm>
-            <a:off x="622300" y="687388"/>
-            <a:ext cx="10769600" cy="0"/>
-          </a:xfrm>
-          <a:prstGeom prst="line">
-            <a:avLst/>
-          </a:prstGeom>
-          <a:noFill/>
-          <a:ln w="19050">
-            <a:solidFill>
-              <a:srgbClr val="0070C0"/>
-            </a:solidFill>
-            <a:round/>
-            <a:headEnd/>
-            <a:tailEnd/>
-          </a:ln>
-        </p:spPr>
-        <p:txBody>
-          <a:bodyPr/>
-          <a:lstStyle/>
-          <a:p>
-            <a:endParaRPr lang="fr-FR"/>
-          </a:p>
-        </p:txBody>
-      </p:sp>
-      <p:sp>
-        <p:nvSpPr>
-          <p:cNvPr id="6148" name="PIC_Bandeau_Rect_Top"/>
-          <p:cNvSpPr>
-            <a:spLocks noChangeArrowheads="1"/>
-          </p:cNvSpPr>
-          <p:nvPr/>
-        </p:nvSpPr>
-        <p:spPr bwMode="auto">
-          <a:xfrm>
-            <a:off x="0" y="-9128"/>
-            <a:ext cx="152400" cy="2295128"/>
-          </a:xfrm>
-          <a:prstGeom prst="rect">
-            <a:avLst/>
-          </a:prstGeom>
-          <a:solidFill>
-            <a:srgbClr val="99CC00"/>
-          </a:solidFill>
-          <a:ln>
-            <a:noFill/>
-          </a:ln>
-        </p:spPr>
-        <p:txBody>
-          <a:bodyPr wrap="none" anchor="ctr"/>
-          <a:lstStyle/>
-          <a:p>
-            <a:endParaRPr lang="fr-FR"/>
-          </a:p>
-        </p:txBody>
-      </p:sp>
-      <p:sp>
-        <p:nvSpPr>
-          <p:cNvPr id="6149" name="PIC_Bandeau_Rect_Mid"/>
-          <p:cNvSpPr>
-            <a:spLocks noChangeArrowheads="1"/>
-          </p:cNvSpPr>
-          <p:nvPr/>
-        </p:nvSpPr>
-        <p:spPr bwMode="auto">
-          <a:xfrm>
-            <a:off x="0" y="2286000"/>
-            <a:ext cx="152400" cy="2286000"/>
-          </a:xfrm>
-          <a:prstGeom prst="rect">
-            <a:avLst/>
-          </a:prstGeom>
-          <a:solidFill>
-            <a:srgbClr val="0070C0"/>
-          </a:solidFill>
-          <a:ln>
-            <a:noFill/>
-          </a:ln>
-        </p:spPr>
-        <p:txBody>
-          <a:bodyPr wrap="none" anchor="ctr"/>
-          <a:lstStyle/>
-          <a:p>
-            <a:endParaRPr lang="fr-FR"/>
-          </a:p>
-        </p:txBody>
-      </p:sp>
-      <p:sp>
-        <p:nvSpPr>
-          <p:cNvPr id="6150" name="PIC_Bandeau_Rect_Bot"/>
-          <p:cNvSpPr>
-            <a:spLocks noChangeArrowheads="1"/>
-          </p:cNvSpPr>
-          <p:nvPr/>
-        </p:nvSpPr>
-        <p:spPr bwMode="auto">
-          <a:xfrm>
-            <a:off x="0" y="4560886"/>
-            <a:ext cx="152400" cy="2286000"/>
-          </a:xfrm>
-          <a:prstGeom prst="rect">
-            <a:avLst/>
-          </a:prstGeom>
-          <a:solidFill>
-            <a:srgbClr val="FF6600"/>
-          </a:solidFill>
-          <a:ln>
-            <a:noFill/>
-          </a:ln>
-        </p:spPr>
-        <p:txBody>
-          <a:bodyPr wrap="none" anchor="ctr"/>
-          <a:lstStyle/>
-          <a:p>
-            <a:endParaRPr lang="fr-FR"/>
-          </a:p>
-        </p:txBody>
-      </p:sp>
-      <p:pic>
-        <p:nvPicPr>
-          <p:cNvPr id="6151" name="PIC_Bandeau_Logo" descr="image.jpeg"/>
-          <p:cNvPicPr>
-            <a:picLocks noChangeAspect="1"/>
-          </p:cNvPicPr>
-          <p:nvPr/>
-        </p:nvPicPr>
-        <p:blipFill>
-          <a:blip r:embed="rId7"/>
-          <a:stretch>
-            <a:fillRect/>
-          </a:stretch>
-        </p:blipFill>
-        <p:spPr>
-          <a:xfrm>
-            <a:off x="11470314" y="20203"/>
-            <a:ext cx="721686" cy="720000"/>
-          </a:xfrm>
-          <a:prstGeom prst="rect">
-            <a:avLst/>
-          </a:prstGeom>
-        </p:spPr>
-      </p:pic>
     </p:spTree>
     <p:custDataLst>
       <p:tags r:id="rId1"/>
@@ -38119,157 +37666,6 @@
           <a:xfrm>
             <a:off x="9751584" y="4735528"/>
             <a:ext cx="2036031" cy="1221619"/>
-          </a:xfrm>
-          <a:prstGeom prst="rect">
-            <a:avLst/>
-          </a:prstGeom>
-        </p:spPr>
-      </p:pic>
-      <p:sp>
-        <p:nvSpPr>
-          <p:cNvPr id="1027" name="PIC_Bandeau_Line"/>
-          <p:cNvSpPr>
-            <a:spLocks noChangeShapeType="1"/>
-          </p:cNvSpPr>
-          <p:nvPr/>
-        </p:nvSpPr>
-        <p:spPr bwMode="auto">
-          <a:xfrm>
-            <a:off x="622300" y="687388"/>
-            <a:ext cx="10769600" cy="0"/>
-          </a:xfrm>
-          <a:prstGeom prst="line">
-            <a:avLst/>
-          </a:prstGeom>
-          <a:noFill/>
-          <a:ln w="19050">
-            <a:solidFill>
-              <a:srgbClr val="0070C0"/>
-            </a:solidFill>
-            <a:round/>
-            <a:headEnd/>
-            <a:tailEnd/>
-          </a:ln>
-        </p:spPr>
-        <p:txBody>
-          <a:bodyPr/>
-          <a:lstStyle/>
-          <a:p>
-            <a:endParaRPr lang="fr-FR"/>
-          </a:p>
-        </p:txBody>
-      </p:sp>
-      <p:sp>
-        <p:nvSpPr>
-          <p:cNvPr id="1028" name="PIC_Bandeau_Rect_Top"/>
-          <p:cNvSpPr>
-            <a:spLocks noChangeArrowheads="1"/>
-          </p:cNvSpPr>
-          <p:nvPr/>
-        </p:nvSpPr>
-        <p:spPr bwMode="auto">
-          <a:xfrm>
-            <a:off x="0" y="-9128"/>
-            <a:ext cx="152400" cy="2295128"/>
-          </a:xfrm>
-          <a:prstGeom prst="rect">
-            <a:avLst/>
-          </a:prstGeom>
-          <a:solidFill>
-            <a:srgbClr val="99CC00"/>
-          </a:solidFill>
-          <a:ln>
-            <a:noFill/>
-          </a:ln>
-        </p:spPr>
-        <p:txBody>
-          <a:bodyPr wrap="none" anchor="ctr"/>
-          <a:lstStyle/>
-          <a:p>
-            <a:endParaRPr lang="fr-FR"/>
-          </a:p>
-        </p:txBody>
-      </p:sp>
-      <p:sp>
-        <p:nvSpPr>
-          <p:cNvPr id="1029" name="PIC_Bandeau_Rect_Mid"/>
-          <p:cNvSpPr>
-            <a:spLocks noChangeArrowheads="1"/>
-          </p:cNvSpPr>
-          <p:nvPr/>
-        </p:nvSpPr>
-        <p:spPr bwMode="auto">
-          <a:xfrm>
-            <a:off x="0" y="2286000"/>
-            <a:ext cx="152400" cy="2286000"/>
-          </a:xfrm>
-          <a:prstGeom prst="rect">
-            <a:avLst/>
-          </a:prstGeom>
-          <a:solidFill>
-            <a:srgbClr val="0070C0"/>
-          </a:solidFill>
-          <a:ln>
-            <a:noFill/>
-          </a:ln>
-        </p:spPr>
-        <p:txBody>
-          <a:bodyPr wrap="none" anchor="ctr"/>
-          <a:lstStyle/>
-          <a:p>
-            <a:endParaRPr lang="fr-FR"/>
-          </a:p>
-        </p:txBody>
-      </p:sp>
-      <p:sp>
-        <p:nvSpPr>
-          <p:cNvPr id="1030" name="PIC_Bandeau_Rect_Bot"/>
-          <p:cNvSpPr>
-            <a:spLocks noChangeArrowheads="1"/>
-          </p:cNvSpPr>
-          <p:nvPr/>
-        </p:nvSpPr>
-        <p:spPr bwMode="auto">
-          <a:xfrm>
-            <a:off x="0" y="4560886"/>
-            <a:ext cx="152400" cy="2286000"/>
-          </a:xfrm>
-          <a:prstGeom prst="rect">
-            <a:avLst/>
-          </a:prstGeom>
-          <a:solidFill>
-            <a:srgbClr val="FF6600"/>
-          </a:solidFill>
-          <a:ln>
-            <a:noFill/>
-          </a:ln>
-        </p:spPr>
-        <p:txBody>
-          <a:bodyPr wrap="none" anchor="ctr"/>
-          <a:lstStyle/>
-          <a:p>
-            <a:endParaRPr lang="fr-FR"/>
-          </a:p>
-        </p:txBody>
-      </p:sp>
-      <p:pic>
-        <p:nvPicPr>
-          <p:cNvPr id="1031" name="PIC_Bandeau_Logo" descr="image.jpeg"/>
-          <p:cNvPicPr>
-            <a:picLocks noChangeAspect="1"/>
-          </p:cNvPicPr>
-          <p:nvPr/>
-        </p:nvPicPr>
-        <p:blipFill>
-          <a:blip r:embed="rId5"/>
-          <a:stretch>
-            <a:fillRect/>
-          </a:stretch>
-        </p:blipFill>
-        <p:spPr>
-          <a:xfrm>
-            <a:off x="11470314" y="20203"/>
-            <a:ext cx="721686" cy="720000"/>
           </a:xfrm>
           <a:prstGeom prst="rect">
             <a:avLst/>
@@ -40559,133 +39955,6 @@
           </a:extLst>
         </p:spPr>
       </p:pic>
-      <p:sp>
-        <p:nvSpPr>
-          <p:cNvPr id="1053" name="PIC_Bandeau_Line"/>
-          <p:cNvSpPr>
-            <a:spLocks noChangeShapeType="1"/>
-          </p:cNvSpPr>
-          <p:nvPr/>
-        </p:nvSpPr>
-        <p:spPr bwMode="auto">
-          <a:xfrm>
-            <a:off x="622300" y="687388"/>
-            <a:ext cx="10769600" cy="0"/>
-          </a:xfrm>
-          <a:prstGeom prst="line">
-            <a:avLst/>
-          </a:prstGeom>
-          <a:noFill/>
-          <a:ln w="19050">
-            <a:solidFill>
-              <a:srgbClr val="0070C0"/>
-            </a:solidFill>
-            <a:round/>
-            <a:headEnd/>
-            <a:tailEnd/>
-          </a:ln>
-        </p:spPr>
-        <p:txBody>
-          <a:bodyPr/>
-          <a:lstStyle/>
-          <a:p>
-            <a:endParaRPr lang="fr-FR"/>
-          </a:p>
-        </p:txBody>
-      </p:sp>
-      <p:sp>
-        <p:nvSpPr>
-          <p:cNvPr id="1054" name="PIC_Bandeau_Rect_Top"/>
-          <p:cNvSpPr>
-            <a:spLocks noChangeArrowheads="1"/>
-          </p:cNvSpPr>
-          <p:nvPr/>
-        </p:nvSpPr>
-        <p:spPr bwMode="auto">
-          <a:xfrm>
-            <a:off x="0" y="-9128"/>
-            <a:ext cx="152400" cy="2295128"/>
-          </a:xfrm>
-          <a:prstGeom prst="rect">
-            <a:avLst/>
-          </a:prstGeom>
-          <a:solidFill>
-            <a:srgbClr val="99CC00"/>
-          </a:solidFill>
-          <a:ln>
-            <a:noFill/>
-          </a:ln>
-        </p:spPr>
-        <p:txBody>
-          <a:bodyPr wrap="none" anchor="ctr"/>
-          <a:lstStyle/>
-          <a:p>
-            <a:endParaRPr lang="fr-FR"/>
-          </a:p>
-        </p:txBody>
-      </p:sp>
-      <p:sp>
-        <p:nvSpPr>
-          <p:cNvPr id="1055" name="PIC_Bandeau_Rect_Mid"/>
-          <p:cNvSpPr>
-            <a:spLocks noChangeArrowheads="1"/>
-          </p:cNvSpPr>
-          <p:nvPr/>
-        </p:nvSpPr>
-        <p:spPr bwMode="auto">
-          <a:xfrm>
-            <a:off x="0" y="2286000"/>
-            <a:ext cx="152400" cy="2286000"/>
-          </a:xfrm>
-          <a:prstGeom prst="rect">
-            <a:avLst/>
-          </a:prstGeom>
-          <a:solidFill>
-            <a:srgbClr val="0070C0"/>
-          </a:solidFill>
-          <a:ln>
-            <a:noFill/>
-          </a:ln>
-        </p:spPr>
-        <p:txBody>
-          <a:bodyPr wrap="none" anchor="ctr"/>
-          <a:lstStyle/>
-          <a:p>
-            <a:endParaRPr lang="fr-FR"/>
-          </a:p>
-        </p:txBody>
-      </p:sp>
-      <p:sp>
-        <p:nvSpPr>
-          <p:cNvPr id="1056" name="PIC_Bandeau_Rect_Bot"/>
-          <p:cNvSpPr>
-            <a:spLocks noChangeArrowheads="1"/>
-          </p:cNvSpPr>
-          <p:nvPr/>
-        </p:nvSpPr>
-        <p:spPr bwMode="auto">
-          <a:xfrm>
-            <a:off x="0" y="4560886"/>
-            <a:ext cx="152400" cy="2286000"/>
-          </a:xfrm>
-          <a:prstGeom prst="rect">
-            <a:avLst/>
-          </a:prstGeom>
-          <a:solidFill>
-            <a:srgbClr val="FF6600"/>
-          </a:solidFill>
-          <a:ln>
-            <a:noFill/>
-          </a:ln>
-        </p:spPr>
-        <p:txBody>
-          <a:bodyPr wrap="none" anchor="ctr"/>
-          <a:lstStyle/>
-          <a:p>
-            <a:endParaRPr lang="fr-FR"/>
-          </a:p>
-        </p:txBody>
-      </p:sp>
     </p:spTree>
     <p:extLst>
       <p:ext uri="{BB962C8B-B14F-4D97-AF65-F5344CB8AC3E}">
@@ -43396,133 +42665,6 @@
           </a:prstGeom>
         </p:spPr>
       </p:pic>
-      <p:sp>
-        <p:nvSpPr>
-          <p:cNvPr id="20523" name="PIC_Bandeau_Line"/>
-          <p:cNvSpPr>
-            <a:spLocks noChangeShapeType="1"/>
-          </p:cNvSpPr>
-          <p:nvPr/>
-        </p:nvSpPr>
-        <p:spPr bwMode="auto">
-          <a:xfrm>
-            <a:off x="622300" y="687388"/>
-            <a:ext cx="10769600" cy="0"/>
-          </a:xfrm>
-          <a:prstGeom prst="line">
-            <a:avLst/>
-          </a:prstGeom>
-          <a:noFill/>
-          <a:ln w="19050">
-            <a:solidFill>
-              <a:srgbClr val="0070C0"/>
-            </a:solidFill>
-            <a:round/>
-            <a:headEnd/>
-            <a:tailEnd/>
-          </a:ln>
-        </p:spPr>
-        <p:txBody>
-          <a:bodyPr/>
-          <a:lstStyle/>
-          <a:p>
-            <a:endParaRPr lang="fr-FR"/>
-          </a:p>
-        </p:txBody>
-      </p:sp>
-      <p:sp>
-        <p:nvSpPr>
-          <p:cNvPr id="20524" name="PIC_Bandeau_Rect_Top"/>
-          <p:cNvSpPr>
-            <a:spLocks noChangeArrowheads="1"/>
-          </p:cNvSpPr>
-          <p:nvPr/>
-        </p:nvSpPr>
-        <p:spPr bwMode="auto">
-          <a:xfrm>
-            <a:off x="0" y="-9128"/>
-            <a:ext cx="152400" cy="2295128"/>
-          </a:xfrm>
-          <a:prstGeom prst="rect">
-            <a:avLst/>
-          </a:prstGeom>
-          <a:solidFill>
-            <a:srgbClr val="99CC00"/>
-          </a:solidFill>
-          <a:ln>
-            <a:noFill/>
-          </a:ln>
-        </p:spPr>
-        <p:txBody>
-          <a:bodyPr wrap="none" anchor="ctr"/>
-          <a:lstStyle/>
-          <a:p>
-            <a:endParaRPr lang="fr-FR"/>
-          </a:p>
-        </p:txBody>
-      </p:sp>
-      <p:sp>
-        <p:nvSpPr>
-          <p:cNvPr id="20525" name="PIC_Bandeau_Rect_Mid"/>
-          <p:cNvSpPr>
-            <a:spLocks noChangeArrowheads="1"/>
-          </p:cNvSpPr>
-          <p:nvPr/>
-        </p:nvSpPr>
-        <p:spPr bwMode="auto">
-          <a:xfrm>
-            <a:off x="0" y="2286000"/>
-            <a:ext cx="152400" cy="2286000"/>
-          </a:xfrm>
-          <a:prstGeom prst="rect">
-            <a:avLst/>
-          </a:prstGeom>
-          <a:solidFill>
-            <a:srgbClr val="0070C0"/>
-          </a:solidFill>
-          <a:ln>
-            <a:noFill/>
-          </a:ln>
-        </p:spPr>
-        <p:txBody>
-          <a:bodyPr wrap="none" anchor="ctr"/>
-          <a:lstStyle/>
-          <a:p>
-            <a:endParaRPr lang="fr-FR"/>
-          </a:p>
-        </p:txBody>
-      </p:sp>
-      <p:sp>
-        <p:nvSpPr>
-          <p:cNvPr id="20526" name="PIC_Bandeau_Rect_Bot"/>
-          <p:cNvSpPr>
-            <a:spLocks noChangeArrowheads="1"/>
-          </p:cNvSpPr>
-          <p:nvPr/>
-        </p:nvSpPr>
-        <p:spPr bwMode="auto">
-          <a:xfrm>
-            <a:off x="0" y="4560886"/>
-            <a:ext cx="152400" cy="2286000"/>
-          </a:xfrm>
-          <a:prstGeom prst="rect">
-            <a:avLst/>
-          </a:prstGeom>
-          <a:solidFill>
-            <a:srgbClr val="FF6600"/>
-          </a:solidFill>
-          <a:ln>
-            <a:noFill/>
-          </a:ln>
-        </p:spPr>
-        <p:txBody>
-          <a:bodyPr wrap="none" anchor="ctr"/>
-          <a:lstStyle/>
-          <a:p>
-            <a:endParaRPr lang="fr-FR"/>
-          </a:p>
-        </p:txBody>
-      </p:sp>
     </p:spTree>
     <p:custDataLst>
       <p:tags r:id="rId1"/>

--- a/templates/commercial-closing.pptx
+++ b/templates/commercial-closing.pptx
@@ -32569,6 +32569,157 @@
           </a:p>
         </p:txBody>
       </p:sp>
+      <p:sp>
+        <p:nvSpPr>
+          <p:cNvPr id="8" name="PIC_Bandeau_Line"/>
+          <p:cNvSpPr>
+            <a:spLocks noChangeShapeType="1"/>
+          </p:cNvSpPr>
+          <p:nvPr/>
+        </p:nvSpPr>
+        <p:spPr bwMode="auto">
+          <a:xfrm>
+            <a:off x="622300" y="687388"/>
+            <a:ext cx="10769600" cy="0"/>
+          </a:xfrm>
+          <a:prstGeom prst="line">
+            <a:avLst/>
+          </a:prstGeom>
+          <a:noFill/>
+          <a:ln w="19050">
+            <a:solidFill>
+              <a:srgbClr val="0070C0"/>
+            </a:solidFill>
+            <a:round/>
+            <a:headEnd/>
+            <a:tailEnd/>
+          </a:ln>
+        </p:spPr>
+        <p:txBody>
+          <a:bodyPr/>
+          <a:lstStyle/>
+          <a:p>
+            <a:endParaRPr lang="fr-FR"/>
+          </a:p>
+        </p:txBody>
+      </p:sp>
+      <p:sp>
+        <p:nvSpPr>
+          <p:cNvPr id="9" name="PIC_Bandeau_Rect_Top"/>
+          <p:cNvSpPr>
+            <a:spLocks noChangeArrowheads="1"/>
+          </p:cNvSpPr>
+          <p:nvPr/>
+        </p:nvSpPr>
+        <p:spPr bwMode="auto">
+          <a:xfrm>
+            <a:off x="0" y="-9128"/>
+            <a:ext cx="152400" cy="2295128"/>
+          </a:xfrm>
+          <a:prstGeom prst="rect">
+            <a:avLst/>
+          </a:prstGeom>
+          <a:solidFill>
+            <a:srgbClr val="99CC00"/>
+          </a:solidFill>
+          <a:ln>
+            <a:noFill/>
+          </a:ln>
+        </p:spPr>
+        <p:txBody>
+          <a:bodyPr wrap="none" anchor="ctr"/>
+          <a:lstStyle/>
+          <a:p>
+            <a:endParaRPr lang="fr-FR"/>
+          </a:p>
+        </p:txBody>
+      </p:sp>
+      <p:sp>
+        <p:nvSpPr>
+          <p:cNvPr id="10" name="PIC_Bandeau_Rect_Mid"/>
+          <p:cNvSpPr>
+            <a:spLocks noChangeArrowheads="1"/>
+          </p:cNvSpPr>
+          <p:nvPr/>
+        </p:nvSpPr>
+        <p:spPr bwMode="auto">
+          <a:xfrm>
+            <a:off x="0" y="2286000"/>
+            <a:ext cx="152400" cy="2286000"/>
+          </a:xfrm>
+          <a:prstGeom prst="rect">
+            <a:avLst/>
+          </a:prstGeom>
+          <a:solidFill>
+            <a:srgbClr val="0070C0"/>
+          </a:solidFill>
+          <a:ln>
+            <a:noFill/>
+          </a:ln>
+        </p:spPr>
+        <p:txBody>
+          <a:bodyPr wrap="none" anchor="ctr"/>
+          <a:lstStyle/>
+          <a:p>
+            <a:endParaRPr lang="fr-FR"/>
+          </a:p>
+        </p:txBody>
+      </p:sp>
+      <p:sp>
+        <p:nvSpPr>
+          <p:cNvPr id="11" name="PIC_Bandeau_Rect_Bot"/>
+          <p:cNvSpPr>
+            <a:spLocks noChangeArrowheads="1"/>
+          </p:cNvSpPr>
+          <p:nvPr/>
+        </p:nvSpPr>
+        <p:spPr bwMode="auto">
+          <a:xfrm>
+            <a:off x="0" y="4560886"/>
+            <a:ext cx="152400" cy="2286000"/>
+          </a:xfrm>
+          <a:prstGeom prst="rect">
+            <a:avLst/>
+          </a:prstGeom>
+          <a:solidFill>
+            <a:srgbClr val="FF6600"/>
+          </a:solidFill>
+          <a:ln>
+            <a:noFill/>
+          </a:ln>
+        </p:spPr>
+        <p:txBody>
+          <a:bodyPr wrap="none" anchor="ctr"/>
+          <a:lstStyle/>
+          <a:p>
+            <a:endParaRPr lang="fr-FR"/>
+          </a:p>
+        </p:txBody>
+      </p:sp>
+      <p:pic>
+        <p:nvPicPr>
+          <p:cNvPr id="12" name="PIC_Bandeau_Logo" descr="image.jpeg"/>
+          <p:cNvPicPr>
+            <a:picLocks noChangeAspect="1"/>
+          </p:cNvPicPr>
+          <p:nvPr/>
+        </p:nvPicPr>
+        <p:blipFill>
+          <a:blip r:embed="rId4"/>
+          <a:stretch>
+            <a:fillRect/>
+          </a:stretch>
+        </p:blipFill>
+        <p:spPr>
+          <a:xfrm>
+            <a:off x="11470314" y="20203"/>
+            <a:ext cx="721686" cy="720000"/>
+          </a:xfrm>
+          <a:prstGeom prst="rect">
+            <a:avLst/>
+          </a:prstGeom>
+        </p:spPr>
+      </p:pic>
     </p:spTree>
     <p:extLst>
       <p:ext uri="{BB962C8B-B14F-4D97-AF65-F5344CB8AC3E}">
@@ -34113,6 +34264,157 @@
           </a:p>
         </p:txBody>
       </p:sp>
+      <p:sp>
+        <p:nvSpPr>
+          <p:cNvPr id="6147" name="PIC_Bandeau_Line"/>
+          <p:cNvSpPr>
+            <a:spLocks noChangeShapeType="1"/>
+          </p:cNvSpPr>
+          <p:nvPr/>
+        </p:nvSpPr>
+        <p:spPr bwMode="auto">
+          <a:xfrm>
+            <a:off x="622300" y="687388"/>
+            <a:ext cx="10769600" cy="0"/>
+          </a:xfrm>
+          <a:prstGeom prst="line">
+            <a:avLst/>
+          </a:prstGeom>
+          <a:noFill/>
+          <a:ln w="19050">
+            <a:solidFill>
+              <a:srgbClr val="0070C0"/>
+            </a:solidFill>
+            <a:round/>
+            <a:headEnd/>
+            <a:tailEnd/>
+          </a:ln>
+        </p:spPr>
+        <p:txBody>
+          <a:bodyPr/>
+          <a:lstStyle/>
+          <a:p>
+            <a:endParaRPr lang="fr-FR"/>
+          </a:p>
+        </p:txBody>
+      </p:sp>
+      <p:sp>
+        <p:nvSpPr>
+          <p:cNvPr id="6148" name="PIC_Bandeau_Rect_Top"/>
+          <p:cNvSpPr>
+            <a:spLocks noChangeArrowheads="1"/>
+          </p:cNvSpPr>
+          <p:nvPr/>
+        </p:nvSpPr>
+        <p:spPr bwMode="auto">
+          <a:xfrm>
+            <a:off x="0" y="-9128"/>
+            <a:ext cx="152400" cy="2295128"/>
+          </a:xfrm>
+          <a:prstGeom prst="rect">
+            <a:avLst/>
+          </a:prstGeom>
+          <a:solidFill>
+            <a:srgbClr val="99CC00"/>
+          </a:solidFill>
+          <a:ln>
+            <a:noFill/>
+          </a:ln>
+        </p:spPr>
+        <p:txBody>
+          <a:bodyPr wrap="none" anchor="ctr"/>
+          <a:lstStyle/>
+          <a:p>
+            <a:endParaRPr lang="fr-FR"/>
+          </a:p>
+        </p:txBody>
+      </p:sp>
+      <p:sp>
+        <p:nvSpPr>
+          <p:cNvPr id="6149" name="PIC_Bandeau_Rect_Mid"/>
+          <p:cNvSpPr>
+            <a:spLocks noChangeArrowheads="1"/>
+          </p:cNvSpPr>
+          <p:nvPr/>
+        </p:nvSpPr>
+        <p:spPr bwMode="auto">
+          <a:xfrm>
+            <a:off x="0" y="2286000"/>
+            <a:ext cx="152400" cy="2286000"/>
+          </a:xfrm>
+          <a:prstGeom prst="rect">
+            <a:avLst/>
+          </a:prstGeom>
+          <a:solidFill>
+            <a:srgbClr val="0070C0"/>
+          </a:solidFill>
+          <a:ln>
+            <a:noFill/>
+          </a:ln>
+        </p:spPr>
+        <p:txBody>
+          <a:bodyPr wrap="none" anchor="ctr"/>
+          <a:lstStyle/>
+          <a:p>
+            <a:endParaRPr lang="fr-FR"/>
+          </a:p>
+        </p:txBody>
+      </p:sp>
+      <p:sp>
+        <p:nvSpPr>
+          <p:cNvPr id="6150" name="PIC_Bandeau_Rect_Bot"/>
+          <p:cNvSpPr>
+            <a:spLocks noChangeArrowheads="1"/>
+          </p:cNvSpPr>
+          <p:nvPr/>
+        </p:nvSpPr>
+        <p:spPr bwMode="auto">
+          <a:xfrm>
+            <a:off x="0" y="4560886"/>
+            <a:ext cx="152400" cy="2286000"/>
+          </a:xfrm>
+          <a:prstGeom prst="rect">
+            <a:avLst/>
+          </a:prstGeom>
+          <a:solidFill>
+            <a:srgbClr val="FF6600"/>
+          </a:solidFill>
+          <a:ln>
+            <a:noFill/>
+          </a:ln>
+        </p:spPr>
+        <p:txBody>
+          <a:bodyPr wrap="none" anchor="ctr"/>
+          <a:lstStyle/>
+          <a:p>
+            <a:endParaRPr lang="fr-FR"/>
+          </a:p>
+        </p:txBody>
+      </p:sp>
+      <p:pic>
+        <p:nvPicPr>
+          <p:cNvPr id="6151" name="PIC_Bandeau_Logo" descr="image.jpeg"/>
+          <p:cNvPicPr>
+            <a:picLocks noChangeAspect="1"/>
+          </p:cNvPicPr>
+          <p:nvPr/>
+        </p:nvPicPr>
+        <p:blipFill>
+          <a:blip r:embed="rId5"/>
+          <a:stretch>
+            <a:fillRect/>
+          </a:stretch>
+        </p:blipFill>
+        <p:spPr>
+          <a:xfrm>
+            <a:off x="11470314" y="20203"/>
+            <a:ext cx="721686" cy="720000"/>
+          </a:xfrm>
+          <a:prstGeom prst="rect">
+            <a:avLst/>
+          </a:prstGeom>
+        </p:spPr>
+      </p:pic>
     </p:spTree>
     <p:custDataLst>
       <p:tags r:id="rId1"/>
@@ -36016,6 +36318,157 @@
           </a:p>
         </p:txBody>
       </p:sp>
+      <p:sp>
+        <p:nvSpPr>
+          <p:cNvPr id="6147" name="PIC_Bandeau_Line"/>
+          <p:cNvSpPr>
+            <a:spLocks noChangeShapeType="1"/>
+          </p:cNvSpPr>
+          <p:nvPr/>
+        </p:nvSpPr>
+        <p:spPr bwMode="auto">
+          <a:xfrm>
+            <a:off x="622300" y="687388"/>
+            <a:ext cx="10769600" cy="0"/>
+          </a:xfrm>
+          <a:prstGeom prst="line">
+            <a:avLst/>
+          </a:prstGeom>
+          <a:noFill/>
+          <a:ln w="19050">
+            <a:solidFill>
+              <a:srgbClr val="0070C0"/>
+            </a:solidFill>
+            <a:round/>
+            <a:headEnd/>
+            <a:tailEnd/>
+          </a:ln>
+        </p:spPr>
+        <p:txBody>
+          <a:bodyPr/>
+          <a:lstStyle/>
+          <a:p>
+            <a:endParaRPr lang="fr-FR"/>
+          </a:p>
+        </p:txBody>
+      </p:sp>
+      <p:sp>
+        <p:nvSpPr>
+          <p:cNvPr id="6148" name="PIC_Bandeau_Rect_Top"/>
+          <p:cNvSpPr>
+            <a:spLocks noChangeArrowheads="1"/>
+          </p:cNvSpPr>
+          <p:nvPr/>
+        </p:nvSpPr>
+        <p:spPr bwMode="auto">
+          <a:xfrm>
+            <a:off x="0" y="-9128"/>
+            <a:ext cx="152400" cy="2295128"/>
+          </a:xfrm>
+          <a:prstGeom prst="rect">
+            <a:avLst/>
+          </a:prstGeom>
+          <a:solidFill>
+            <a:srgbClr val="99CC00"/>
+          </a:solidFill>
+          <a:ln>
+            <a:noFill/>
+          </a:ln>
+        </p:spPr>
+        <p:txBody>
+          <a:bodyPr wrap="none" anchor="ctr"/>
+          <a:lstStyle/>
+          <a:p>
+            <a:endParaRPr lang="fr-FR"/>
+          </a:p>
+        </p:txBody>
+      </p:sp>
+      <p:sp>
+        <p:nvSpPr>
+          <p:cNvPr id="6149" name="PIC_Bandeau_Rect_Mid"/>
+          <p:cNvSpPr>
+            <a:spLocks noChangeArrowheads="1"/>
+          </p:cNvSpPr>
+          <p:nvPr/>
+        </p:nvSpPr>
+        <p:spPr bwMode="auto">
+          <a:xfrm>
+            <a:off x="0" y="2286000"/>
+            <a:ext cx="152400" cy="2286000"/>
+          </a:xfrm>
+          <a:prstGeom prst="rect">
+            <a:avLst/>
+          </a:prstGeom>
+          <a:solidFill>
+            <a:srgbClr val="0070C0"/>
+          </a:solidFill>
+          <a:ln>
+            <a:noFill/>
+          </a:ln>
+        </p:spPr>
+        <p:txBody>
+          <a:bodyPr wrap="none" anchor="ctr"/>
+          <a:lstStyle/>
+          <a:p>
+            <a:endParaRPr lang="fr-FR"/>
+          </a:p>
+        </p:txBody>
+      </p:sp>
+      <p:sp>
+        <p:nvSpPr>
+          <p:cNvPr id="6150" name="PIC_Bandeau_Rect_Bot"/>
+          <p:cNvSpPr>
+            <a:spLocks noChangeArrowheads="1"/>
+          </p:cNvSpPr>
+          <p:nvPr/>
+        </p:nvSpPr>
+        <p:spPr bwMode="auto">
+          <a:xfrm>
+            <a:off x="0" y="4560886"/>
+            <a:ext cx="152400" cy="2286000"/>
+          </a:xfrm>
+          <a:prstGeom prst="rect">
+            <a:avLst/>
+          </a:prstGeom>
+          <a:solidFill>
+            <a:srgbClr val="FF6600"/>
+          </a:solidFill>
+          <a:ln>
+            <a:noFill/>
+          </a:ln>
+        </p:spPr>
+        <p:txBody>
+          <a:bodyPr wrap="none" anchor="ctr"/>
+          <a:lstStyle/>
+          <a:p>
+            <a:endParaRPr lang="fr-FR"/>
+          </a:p>
+        </p:txBody>
+      </p:sp>
+      <p:pic>
+        <p:nvPicPr>
+          <p:cNvPr id="6151" name="PIC_Bandeau_Logo" descr="image.jpeg"/>
+          <p:cNvPicPr>
+            <a:picLocks noChangeAspect="1"/>
+          </p:cNvPicPr>
+          <p:nvPr/>
+        </p:nvPicPr>
+        <p:blipFill>
+          <a:blip r:embed="rId7"/>
+          <a:stretch>
+            <a:fillRect/>
+          </a:stretch>
+        </p:blipFill>
+        <p:spPr>
+          <a:xfrm>
+            <a:off x="11470314" y="20203"/>
+            <a:ext cx="721686" cy="720000"/>
+          </a:xfrm>
+          <a:prstGeom prst="rect">
+            <a:avLst/>
+          </a:prstGeom>
+        </p:spPr>
+      </p:pic>
     </p:spTree>
     <p:custDataLst>
       <p:tags r:id="rId1"/>
@@ -37666,6 +38119,157 @@
           <a:xfrm>
             <a:off x="9751584" y="4735528"/>
             <a:ext cx="2036031" cy="1221619"/>
+          </a:xfrm>
+          <a:prstGeom prst="rect">
+            <a:avLst/>
+          </a:prstGeom>
+        </p:spPr>
+      </p:pic>
+      <p:sp>
+        <p:nvSpPr>
+          <p:cNvPr id="1027" name="PIC_Bandeau_Line"/>
+          <p:cNvSpPr>
+            <a:spLocks noChangeShapeType="1"/>
+          </p:cNvSpPr>
+          <p:nvPr/>
+        </p:nvSpPr>
+        <p:spPr bwMode="auto">
+          <a:xfrm>
+            <a:off x="622300" y="687388"/>
+            <a:ext cx="10769600" cy="0"/>
+          </a:xfrm>
+          <a:prstGeom prst="line">
+            <a:avLst/>
+          </a:prstGeom>
+          <a:noFill/>
+          <a:ln w="19050">
+            <a:solidFill>
+              <a:srgbClr val="0070C0"/>
+            </a:solidFill>
+            <a:round/>
+            <a:headEnd/>
+            <a:tailEnd/>
+          </a:ln>
+        </p:spPr>
+        <p:txBody>
+          <a:bodyPr/>
+          <a:lstStyle/>
+          <a:p>
+            <a:endParaRPr lang="fr-FR"/>
+          </a:p>
+        </p:txBody>
+      </p:sp>
+      <p:sp>
+        <p:nvSpPr>
+          <p:cNvPr id="1028" name="PIC_Bandeau_Rect_Top"/>
+          <p:cNvSpPr>
+            <a:spLocks noChangeArrowheads="1"/>
+          </p:cNvSpPr>
+          <p:nvPr/>
+        </p:nvSpPr>
+        <p:spPr bwMode="auto">
+          <a:xfrm>
+            <a:off x="0" y="-9128"/>
+            <a:ext cx="152400" cy="2295128"/>
+          </a:xfrm>
+          <a:prstGeom prst="rect">
+            <a:avLst/>
+          </a:prstGeom>
+          <a:solidFill>
+            <a:srgbClr val="99CC00"/>
+          </a:solidFill>
+          <a:ln>
+            <a:noFill/>
+          </a:ln>
+        </p:spPr>
+        <p:txBody>
+          <a:bodyPr wrap="none" anchor="ctr"/>
+          <a:lstStyle/>
+          <a:p>
+            <a:endParaRPr lang="fr-FR"/>
+          </a:p>
+        </p:txBody>
+      </p:sp>
+      <p:sp>
+        <p:nvSpPr>
+          <p:cNvPr id="1029" name="PIC_Bandeau_Rect_Mid"/>
+          <p:cNvSpPr>
+            <a:spLocks noChangeArrowheads="1"/>
+          </p:cNvSpPr>
+          <p:nvPr/>
+        </p:nvSpPr>
+        <p:spPr bwMode="auto">
+          <a:xfrm>
+            <a:off x="0" y="2286000"/>
+            <a:ext cx="152400" cy="2286000"/>
+          </a:xfrm>
+          <a:prstGeom prst="rect">
+            <a:avLst/>
+          </a:prstGeom>
+          <a:solidFill>
+            <a:srgbClr val="0070C0"/>
+          </a:solidFill>
+          <a:ln>
+            <a:noFill/>
+          </a:ln>
+        </p:spPr>
+        <p:txBody>
+          <a:bodyPr wrap="none" anchor="ctr"/>
+          <a:lstStyle/>
+          <a:p>
+            <a:endParaRPr lang="fr-FR"/>
+          </a:p>
+        </p:txBody>
+      </p:sp>
+      <p:sp>
+        <p:nvSpPr>
+          <p:cNvPr id="1030" name="PIC_Bandeau_Rect_Bot"/>
+          <p:cNvSpPr>
+            <a:spLocks noChangeArrowheads="1"/>
+          </p:cNvSpPr>
+          <p:nvPr/>
+        </p:nvSpPr>
+        <p:spPr bwMode="auto">
+          <a:xfrm>
+            <a:off x="0" y="4560886"/>
+            <a:ext cx="152400" cy="2286000"/>
+          </a:xfrm>
+          <a:prstGeom prst="rect">
+            <a:avLst/>
+          </a:prstGeom>
+          <a:solidFill>
+            <a:srgbClr val="FF6600"/>
+          </a:solidFill>
+          <a:ln>
+            <a:noFill/>
+          </a:ln>
+        </p:spPr>
+        <p:txBody>
+          <a:bodyPr wrap="none" anchor="ctr"/>
+          <a:lstStyle/>
+          <a:p>
+            <a:endParaRPr lang="fr-FR"/>
+          </a:p>
+        </p:txBody>
+      </p:sp>
+      <p:pic>
+        <p:nvPicPr>
+          <p:cNvPr id="1031" name="PIC_Bandeau_Logo" descr="image.jpeg"/>
+          <p:cNvPicPr>
+            <a:picLocks noChangeAspect="1"/>
+          </p:cNvPicPr>
+          <p:nvPr/>
+        </p:nvPicPr>
+        <p:blipFill>
+          <a:blip r:embed="rId5"/>
+          <a:stretch>
+            <a:fillRect/>
+          </a:stretch>
+        </p:blipFill>
+        <p:spPr>
+          <a:xfrm>
+            <a:off x="11470314" y="20203"/>
+            <a:ext cx="721686" cy="720000"/>
           </a:xfrm>
           <a:prstGeom prst="rect">
             <a:avLst/>
